--- a/docs/2026-09-progress-report.pptx
+++ b/docs/2026-09-progress-report.pptx
@@ -5,20 +5,20 @@
     <p:sldMasterId id="2147483648" r:id="rId1"/>
   </p:sldMasterIdLst>
   <p:sldIdLst>
-    <p:sldId id="256" r:id="rId7"/>
-    <p:sldId id="257" r:id="rId8"/>
-    <p:sldId id="258" r:id="rId9"/>
-    <p:sldId id="259" r:id="rId10"/>
-    <p:sldId id="260" r:id="rId11"/>
-    <p:sldId id="261" r:id="rId12"/>
-    <p:sldId id="262" r:id="rId13"/>
-    <p:sldId id="263" r:id="rId14"/>
-    <p:sldId id="264" r:id="rId15"/>
-    <p:sldId id="265" r:id="rId16"/>
-    <p:sldId id="266" r:id="rId17"/>
-    <p:sldId id="267" r:id="rId18"/>
+    <p:sldId id="256" r:id="rId2"/>
+    <p:sldId id="257" r:id="rId3"/>
+    <p:sldId id="258" r:id="rId4"/>
+    <p:sldId id="259" r:id="rId5"/>
+    <p:sldId id="260" r:id="rId6"/>
+    <p:sldId id="261" r:id="rId7"/>
+    <p:sldId id="262" r:id="rId8"/>
+    <p:sldId id="263" r:id="rId9"/>
+    <p:sldId id="264" r:id="rId10"/>
+    <p:sldId id="265" r:id="rId11"/>
+    <p:sldId id="266" r:id="rId12"/>
+    <p:sldId id="267" r:id="rId13"/>
   </p:sldIdLst>
-  <p:sldSz cx="12191695" cy="6858000" type="screen4x3"/>
+  <p:sldSz cx="12192000" cy="6858000"/>
   <p:notesSz cx="6858000" cy="9144000"/>
   <p:defaultTextStyle>
     <a:defPPr>
@@ -115,18 +115,42 @@
       </a:defRPr>
     </a:lvl9pPr>
   </p:defaultTextStyle>
+  <p:extLst>
+    <p:ext uri="{EFAFB233-063F-42B5-8137-9DF3F51BA10A}">
+      <p15:sldGuideLst xmlns:p15="http://schemas.microsoft.com/office/powerpoint/2012/main">
+        <p15:guide id="1" orient="horz" pos="2160">
+          <p15:clr>
+            <a:srgbClr val="A4A3A4"/>
+          </p15:clr>
+        </p15:guide>
+        <p15:guide id="2" pos="2880">
+          <p15:clr>
+            <a:srgbClr val="A4A3A4"/>
+          </p15:clr>
+        </p15:guide>
+      </p15:sldGuideLst>
+    </p:ext>
+  </p:extLst>
 </p:presentation>
 </file>
 
 <file path=ppt/charts/chart1.xml><?xml version="1.0" encoding="utf-8"?>
-<c:chartSpace xmlns:c="http://schemas.openxmlformats.org/drawingml/2006/chart" xmlns:a="http://schemas.openxmlformats.org/drawingml/2006/main" xmlns:r="http://schemas.openxmlformats.org/officeDocument/2006/relationships">
+<c:chartSpace xmlns:c="http://schemas.openxmlformats.org/drawingml/2006/chart" xmlns:a="http://schemas.openxmlformats.org/drawingml/2006/main" xmlns:r="http://schemas.openxmlformats.org/officeDocument/2006/relationships" xmlns:c16r2="http://schemas.microsoft.com/office/drawing/2015/06/chart">
   <c:date1904 val="0"/>
+  <c:lang val="zh-TW"/>
+  <c:roundedCorners val="1"/>
+  <c:style val="2"/>
   <c:chart>
+    <c:title>
+      <c:overlay val="0"/>
+    </c:title>
     <c:autoTitleDeleted val="0"/>
     <c:plotArea>
+      <c:layout/>
       <c:barChart>
         <c:barDir val="col"/>
         <c:grouping val="clustered"/>
+        <c:varyColors val="1"/>
         <c:ser>
           <c:idx val="0"/>
           <c:order val="0"/>
@@ -146,6 +170,7 @@
               <a:srgbClr val="8962FF"/>
             </a:solidFill>
           </c:spPr>
+          <c:invertIfNegative val="1"/>
           <c:cat>
             <c:strRef>
               <c:f>Sheet1!$A$2:$A$4</c:f>
@@ -181,7 +206,30 @@
               </c:numCache>
             </c:numRef>
           </c:val>
+          <c:extLst>
+            <c:ext xmlns:c14="http://schemas.microsoft.com/office/drawing/2007/8/2/chart" uri="{6F2FDCE9-48DA-4B69-8628-5D25D57E5C99}">
+              <c14:invertSolidFillFmt>
+                <c14:spPr xmlns:c14="http://schemas.microsoft.com/office/drawing/2007/8/2/chart">
+                  <a:solidFill>
+                    <a:srgbClr val="FFFFFF"/>
+                  </a:solidFill>
+                </c14:spPr>
+              </c14:invertSolidFillFmt>
+            </c:ext>
+            <c:ext xmlns:c16="http://schemas.microsoft.com/office/drawing/2014/chart" uri="{C3380CC4-5D6E-409C-BE32-E72D297353CC}">
+              <c16:uniqueId val="{00000000-409A-994B-896E-F650BBCF0B19}"/>
+            </c:ext>
+          </c:extLst>
         </c:ser>
+        <c:dLbls>
+          <c:showLegendKey val="0"/>
+          <c:showVal val="0"/>
+          <c:showCatName val="0"/>
+          <c:showSerName val="0"/>
+          <c:showPercent val="0"/>
+          <c:showBubbleSize val="0"/>
+        </c:dLbls>
+        <c:gapWidth val="150"/>
         <c:axId val="-2068027336"/>
         <c:axId val="-2113994440"/>
       </c:barChart>
@@ -192,6 +240,7 @@
         </c:scaling>
         <c:delete val="0"/>
         <c:axPos val="b"/>
+        <c:numFmt formatCode="General" sourceLinked="0"/>
         <c:majorTickMark val="out"/>
         <c:minorTickMark val="none"/>
         <c:tickLblPos val="nextTo"/>
@@ -202,6 +251,7 @@
             <a:pPr>
               <a:defRPr sz="1300"/>
             </a:pPr>
+            <a:endParaRPr lang="zh-TW"/>
           </a:p>
         </c:txPr>
         <c:crossAx val="-2113994440"/>
@@ -214,12 +264,14 @@
       <c:valAx>
         <c:axId val="-2113994440"/>
         <c:scaling>
-          <c:max val="1.0"/>
-          <c:min val="0.0"/>
+          <c:orientation val="minMax"/>
+          <c:max val="1"/>
+          <c:min val="0"/>
         </c:scaling>
         <c:delete val="0"/>
         <c:axPos val="l"/>
         <c:majorGridlines/>
+        <c:numFmt formatCode="General" sourceLinked="1"/>
         <c:majorTickMark val="out"/>
         <c:minorTickMark val="none"/>
         <c:tickLblPos val="nextTo"/>
@@ -230,14 +282,18 @@
             <a:pPr>
               <a:defRPr sz="1200"/>
             </a:pPr>
+            <a:endParaRPr lang="zh-TW"/>
           </a:p>
         </c:txPr>
         <c:crossAx val="-2068027336"/>
         <c:crosses val="autoZero"/>
+        <c:crossBetween val="between"/>
         <c:majorUnit val="0.2"/>
       </c:valAx>
     </c:plotArea>
+    <c:plotVisOnly val="1"/>
     <c:dispBlanksAs val="gap"/>
+    <c:showDLblsOverMax val="1"/>
   </c:chart>
   <c:txPr>
     <a:bodyPr/>
@@ -293,10 +349,9 @@
           <a:lstStyle/>
           <a:p>
             <a:r>
-              <a:rPr lang="en-US" smtClean="0"/>
+              <a:rPr lang="en-US"/>
               <a:t>Click to edit Master title style</a:t>
             </a:r>
-            <a:endParaRPr lang="en-US"/>
           </a:p>
         </p:txBody>
       </p:sp>
@@ -412,10 +467,9 @@
           </a:lstStyle>
           <a:p>
             <a:r>
-              <a:rPr lang="en-US" smtClean="0"/>
+              <a:rPr lang="en-US"/>
               <a:t>Click to edit Master subtitle style</a:t>
             </a:r>
-            <a:endParaRPr lang="en-US"/>
           </a:p>
         </p:txBody>
       </p:sp>
@@ -436,7 +490,7 @@
           <a:p>
             <a:fld id="{5BCAD085-E8A6-8845-BD4E-CB4CCA059FC4}" type="datetimeFigureOut">
               <a:rPr lang="en-US" smtClean="0"/>
-              <a:t>1/27/13</a:t>
+              <a:t>9/11/26</a:t>
             </a:fld>
             <a:endParaRPr lang="en-US"/>
           </a:p>
@@ -530,10 +584,9 @@
           <a:lstStyle/>
           <a:p>
             <a:r>
-              <a:rPr lang="en-US" smtClean="0"/>
+              <a:rPr lang="en-US"/>
               <a:t>Click to edit Master title style</a:t>
             </a:r>
-            <a:endParaRPr lang="en-US"/>
           </a:p>
         </p:txBody>
       </p:sp>
@@ -554,38 +607,37 @@
           <a:p>
             <a:pPr lvl="0"/>
             <a:r>
-              <a:rPr lang="en-US" smtClean="0"/>
+              <a:rPr lang="en-US"/>
               <a:t>Click to edit Master text styles</a:t>
             </a:r>
           </a:p>
           <a:p>
             <a:pPr lvl="1"/>
             <a:r>
-              <a:rPr lang="en-US" smtClean="0"/>
+              <a:rPr lang="en-US"/>
               <a:t>Second level</a:t>
             </a:r>
           </a:p>
           <a:p>
             <a:pPr lvl="2"/>
             <a:r>
-              <a:rPr lang="en-US" smtClean="0"/>
+              <a:rPr lang="en-US"/>
               <a:t>Third level</a:t>
             </a:r>
           </a:p>
           <a:p>
             <a:pPr lvl="3"/>
             <a:r>
-              <a:rPr lang="en-US" smtClean="0"/>
+              <a:rPr lang="en-US"/>
               <a:t>Fourth level</a:t>
             </a:r>
           </a:p>
           <a:p>
             <a:pPr lvl="4"/>
             <a:r>
-              <a:rPr lang="en-US" smtClean="0"/>
+              <a:rPr lang="en-US"/>
               <a:t>Fifth level</a:t>
             </a:r>
-            <a:endParaRPr lang="en-US"/>
           </a:p>
         </p:txBody>
       </p:sp>
@@ -606,7 +658,7 @@
           <a:p>
             <a:fld id="{5BCAD085-E8A6-8845-BD4E-CB4CCA059FC4}" type="datetimeFigureOut">
               <a:rPr lang="en-US" smtClean="0"/>
-              <a:t>1/27/13</a:t>
+              <a:t>9/11/26</a:t>
             </a:fld>
             <a:endParaRPr lang="en-US"/>
           </a:p>
@@ -705,10 +757,9 @@
           <a:lstStyle/>
           <a:p>
             <a:r>
-              <a:rPr lang="en-US" smtClean="0"/>
+              <a:rPr lang="en-US"/>
               <a:t>Click to edit Master title style</a:t>
             </a:r>
-            <a:endParaRPr lang="en-US"/>
           </a:p>
         </p:txBody>
       </p:sp>
@@ -734,38 +785,37 @@
           <a:p>
             <a:pPr lvl="0"/>
             <a:r>
-              <a:rPr lang="en-US" smtClean="0"/>
+              <a:rPr lang="en-US"/>
               <a:t>Click to edit Master text styles</a:t>
             </a:r>
           </a:p>
           <a:p>
             <a:pPr lvl="1"/>
             <a:r>
-              <a:rPr lang="en-US" smtClean="0"/>
+              <a:rPr lang="en-US"/>
               <a:t>Second level</a:t>
             </a:r>
           </a:p>
           <a:p>
             <a:pPr lvl="2"/>
             <a:r>
-              <a:rPr lang="en-US" smtClean="0"/>
+              <a:rPr lang="en-US"/>
               <a:t>Third level</a:t>
             </a:r>
           </a:p>
           <a:p>
             <a:pPr lvl="3"/>
             <a:r>
-              <a:rPr lang="en-US" smtClean="0"/>
+              <a:rPr lang="en-US"/>
               <a:t>Fourth level</a:t>
             </a:r>
           </a:p>
           <a:p>
             <a:pPr lvl="4"/>
             <a:r>
-              <a:rPr lang="en-US" smtClean="0"/>
+              <a:rPr lang="en-US"/>
               <a:t>Fifth level</a:t>
             </a:r>
-            <a:endParaRPr lang="en-US"/>
           </a:p>
         </p:txBody>
       </p:sp>
@@ -786,7 +836,7 @@
           <a:p>
             <a:fld id="{5BCAD085-E8A6-8845-BD4E-CB4CCA059FC4}" type="datetimeFigureOut">
               <a:rPr lang="en-US" smtClean="0"/>
-              <a:t>1/27/13</a:t>
+              <a:t>9/11/26</a:t>
             </a:fld>
             <a:endParaRPr lang="en-US"/>
           </a:p>
@@ -880,10 +930,9 @@
           <a:lstStyle/>
           <a:p>
             <a:r>
-              <a:rPr lang="en-US" smtClean="0"/>
+              <a:rPr lang="en-US"/>
               <a:t>Click to edit Master title style</a:t>
             </a:r>
-            <a:endParaRPr lang="en-US"/>
           </a:p>
         </p:txBody>
       </p:sp>
@@ -904,38 +953,37 @@
           <a:p>
             <a:pPr lvl="0"/>
             <a:r>
-              <a:rPr lang="en-US" smtClean="0"/>
+              <a:rPr lang="en-US"/>
               <a:t>Click to edit Master text styles</a:t>
             </a:r>
           </a:p>
           <a:p>
             <a:pPr lvl="1"/>
             <a:r>
-              <a:rPr lang="en-US" smtClean="0"/>
+              <a:rPr lang="en-US"/>
               <a:t>Second level</a:t>
             </a:r>
           </a:p>
           <a:p>
             <a:pPr lvl="2"/>
             <a:r>
-              <a:rPr lang="en-US" smtClean="0"/>
+              <a:rPr lang="en-US"/>
               <a:t>Third level</a:t>
             </a:r>
           </a:p>
           <a:p>
             <a:pPr lvl="3"/>
             <a:r>
-              <a:rPr lang="en-US" smtClean="0"/>
+              <a:rPr lang="en-US"/>
               <a:t>Fourth level</a:t>
             </a:r>
           </a:p>
           <a:p>
             <a:pPr lvl="4"/>
             <a:r>
-              <a:rPr lang="en-US" smtClean="0"/>
+              <a:rPr lang="en-US"/>
               <a:t>Fifth level</a:t>
             </a:r>
-            <a:endParaRPr lang="en-US"/>
           </a:p>
         </p:txBody>
       </p:sp>
@@ -956,7 +1004,7 @@
           <a:p>
             <a:fld id="{5BCAD085-E8A6-8845-BD4E-CB4CCA059FC4}" type="datetimeFigureOut">
               <a:rPr lang="en-US" smtClean="0"/>
-              <a:t>1/27/13</a:t>
+              <a:t>9/11/26</a:t>
             </a:fld>
             <a:endParaRPr lang="en-US"/>
           </a:p>
@@ -1059,10 +1107,9 @@
           </a:lstStyle>
           <a:p>
             <a:r>
-              <a:rPr lang="en-US" smtClean="0"/>
+              <a:rPr lang="en-US"/>
               <a:t>Click to edit Master title style</a:t>
             </a:r>
-            <a:endParaRPr lang="en-US"/>
           </a:p>
         </p:txBody>
       </p:sp>
@@ -1179,7 +1226,7 @@
           <a:p>
             <a:pPr lvl="0"/>
             <a:r>
-              <a:rPr lang="en-US" smtClean="0"/>
+              <a:rPr lang="en-US"/>
               <a:t>Click to edit Master text styles</a:t>
             </a:r>
           </a:p>
@@ -1202,7 +1249,7 @@
           <a:p>
             <a:fld id="{5BCAD085-E8A6-8845-BD4E-CB4CCA059FC4}" type="datetimeFigureOut">
               <a:rPr lang="en-US" smtClean="0"/>
-              <a:t>1/27/13</a:t>
+              <a:t>9/11/26</a:t>
             </a:fld>
             <a:endParaRPr lang="en-US"/>
           </a:p>
@@ -1296,10 +1343,9 @@
           <a:lstStyle/>
           <a:p>
             <a:r>
-              <a:rPr lang="en-US" smtClean="0"/>
+              <a:rPr lang="en-US"/>
               <a:t>Click to edit Master title style</a:t>
             </a:r>
-            <a:endParaRPr lang="en-US"/>
           </a:p>
         </p:txBody>
       </p:sp>
@@ -1353,38 +1399,37 @@
           <a:p>
             <a:pPr lvl="0"/>
             <a:r>
-              <a:rPr lang="en-US" smtClean="0"/>
+              <a:rPr lang="en-US"/>
               <a:t>Click to edit Master text styles</a:t>
             </a:r>
           </a:p>
           <a:p>
             <a:pPr lvl="1"/>
             <a:r>
-              <a:rPr lang="en-US" smtClean="0"/>
+              <a:rPr lang="en-US"/>
               <a:t>Second level</a:t>
             </a:r>
           </a:p>
           <a:p>
             <a:pPr lvl="2"/>
             <a:r>
-              <a:rPr lang="en-US" smtClean="0"/>
+              <a:rPr lang="en-US"/>
               <a:t>Third level</a:t>
             </a:r>
           </a:p>
           <a:p>
             <a:pPr lvl="3"/>
             <a:r>
-              <a:rPr lang="en-US" smtClean="0"/>
+              <a:rPr lang="en-US"/>
               <a:t>Fourth level</a:t>
             </a:r>
           </a:p>
           <a:p>
             <a:pPr lvl="4"/>
             <a:r>
-              <a:rPr lang="en-US" smtClean="0"/>
+              <a:rPr lang="en-US"/>
               <a:t>Fifth level</a:t>
             </a:r>
-            <a:endParaRPr lang="en-US"/>
           </a:p>
         </p:txBody>
       </p:sp>
@@ -1438,38 +1483,37 @@
           <a:p>
             <a:pPr lvl="0"/>
             <a:r>
-              <a:rPr lang="en-US" smtClean="0"/>
+              <a:rPr lang="en-US"/>
               <a:t>Click to edit Master text styles</a:t>
             </a:r>
           </a:p>
           <a:p>
             <a:pPr lvl="1"/>
             <a:r>
-              <a:rPr lang="en-US" smtClean="0"/>
+              <a:rPr lang="en-US"/>
               <a:t>Second level</a:t>
             </a:r>
           </a:p>
           <a:p>
             <a:pPr lvl="2"/>
             <a:r>
-              <a:rPr lang="en-US" smtClean="0"/>
+              <a:rPr lang="en-US"/>
               <a:t>Third level</a:t>
             </a:r>
           </a:p>
           <a:p>
             <a:pPr lvl="3"/>
             <a:r>
-              <a:rPr lang="en-US" smtClean="0"/>
+              <a:rPr lang="en-US"/>
               <a:t>Fourth level</a:t>
             </a:r>
           </a:p>
           <a:p>
             <a:pPr lvl="4"/>
             <a:r>
-              <a:rPr lang="en-US" smtClean="0"/>
+              <a:rPr lang="en-US"/>
               <a:t>Fifth level</a:t>
             </a:r>
-            <a:endParaRPr lang="en-US"/>
           </a:p>
         </p:txBody>
       </p:sp>
@@ -1490,7 +1534,7 @@
           <a:p>
             <a:fld id="{5BCAD085-E8A6-8845-BD4E-CB4CCA059FC4}" type="datetimeFigureOut">
               <a:rPr lang="en-US" smtClean="0"/>
-              <a:t>1/27/13</a:t>
+              <a:t>9/11/26</a:t>
             </a:fld>
             <a:endParaRPr lang="en-US"/>
           </a:p>
@@ -1588,10 +1632,9 @@
           </a:lstStyle>
           <a:p>
             <a:r>
-              <a:rPr lang="en-US" smtClean="0"/>
+              <a:rPr lang="en-US"/>
               <a:t>Click to edit Master title style</a:t>
             </a:r>
-            <a:endParaRPr lang="en-US"/>
           </a:p>
         </p:txBody>
       </p:sp>
@@ -1654,7 +1697,7 @@
           <a:p>
             <a:pPr lvl="0"/>
             <a:r>
-              <a:rPr lang="en-US" smtClean="0"/>
+              <a:rPr lang="en-US"/>
               <a:t>Click to edit Master text styles</a:t>
             </a:r>
           </a:p>
@@ -1710,38 +1753,37 @@
           <a:p>
             <a:pPr lvl="0"/>
             <a:r>
-              <a:rPr lang="en-US" smtClean="0"/>
+              <a:rPr lang="en-US"/>
               <a:t>Click to edit Master text styles</a:t>
             </a:r>
           </a:p>
           <a:p>
             <a:pPr lvl="1"/>
             <a:r>
-              <a:rPr lang="en-US" smtClean="0"/>
+              <a:rPr lang="en-US"/>
               <a:t>Second level</a:t>
             </a:r>
           </a:p>
           <a:p>
             <a:pPr lvl="2"/>
             <a:r>
-              <a:rPr lang="en-US" smtClean="0"/>
+              <a:rPr lang="en-US"/>
               <a:t>Third level</a:t>
             </a:r>
           </a:p>
           <a:p>
             <a:pPr lvl="3"/>
             <a:r>
-              <a:rPr lang="en-US" smtClean="0"/>
+              <a:rPr lang="en-US"/>
               <a:t>Fourth level</a:t>
             </a:r>
           </a:p>
           <a:p>
             <a:pPr lvl="4"/>
             <a:r>
-              <a:rPr lang="en-US" smtClean="0"/>
+              <a:rPr lang="en-US"/>
               <a:t>Fifth level</a:t>
             </a:r>
-            <a:endParaRPr lang="en-US"/>
           </a:p>
         </p:txBody>
       </p:sp>
@@ -1804,7 +1846,7 @@
           <a:p>
             <a:pPr lvl="0"/>
             <a:r>
-              <a:rPr lang="en-US" smtClean="0"/>
+              <a:rPr lang="en-US"/>
               <a:t>Click to edit Master text styles</a:t>
             </a:r>
           </a:p>
@@ -1860,38 +1902,37 @@
           <a:p>
             <a:pPr lvl="0"/>
             <a:r>
-              <a:rPr lang="en-US" smtClean="0"/>
+              <a:rPr lang="en-US"/>
               <a:t>Click to edit Master text styles</a:t>
             </a:r>
           </a:p>
           <a:p>
             <a:pPr lvl="1"/>
             <a:r>
-              <a:rPr lang="en-US" smtClean="0"/>
+              <a:rPr lang="en-US"/>
               <a:t>Second level</a:t>
             </a:r>
           </a:p>
           <a:p>
             <a:pPr lvl="2"/>
             <a:r>
-              <a:rPr lang="en-US" smtClean="0"/>
+              <a:rPr lang="en-US"/>
               <a:t>Third level</a:t>
             </a:r>
           </a:p>
           <a:p>
             <a:pPr lvl="3"/>
             <a:r>
-              <a:rPr lang="en-US" smtClean="0"/>
+              <a:rPr lang="en-US"/>
               <a:t>Fourth level</a:t>
             </a:r>
           </a:p>
           <a:p>
             <a:pPr lvl="4"/>
             <a:r>
-              <a:rPr lang="en-US" smtClean="0"/>
+              <a:rPr lang="en-US"/>
               <a:t>Fifth level</a:t>
             </a:r>
-            <a:endParaRPr lang="en-US"/>
           </a:p>
         </p:txBody>
       </p:sp>
@@ -1912,7 +1953,7 @@
           <a:p>
             <a:fld id="{5BCAD085-E8A6-8845-BD4E-CB4CCA059FC4}" type="datetimeFigureOut">
               <a:rPr lang="en-US" smtClean="0"/>
-              <a:t>1/27/13</a:t>
+              <a:t>9/11/26</a:t>
             </a:fld>
             <a:endParaRPr lang="en-US"/>
           </a:p>
@@ -2006,10 +2047,9 @@
           <a:lstStyle/>
           <a:p>
             <a:r>
-              <a:rPr lang="en-US" smtClean="0"/>
+              <a:rPr lang="en-US"/>
               <a:t>Click to edit Master title style</a:t>
             </a:r>
-            <a:endParaRPr lang="en-US"/>
           </a:p>
         </p:txBody>
       </p:sp>
@@ -2030,7 +2070,7 @@
           <a:p>
             <a:fld id="{5BCAD085-E8A6-8845-BD4E-CB4CCA059FC4}" type="datetimeFigureOut">
               <a:rPr lang="en-US" smtClean="0"/>
-              <a:t>1/27/13</a:t>
+              <a:t>9/11/26</a:t>
             </a:fld>
             <a:endParaRPr lang="en-US"/>
           </a:p>
@@ -2125,7 +2165,7 @@
           <a:p>
             <a:fld id="{5BCAD085-E8A6-8845-BD4E-CB4CCA059FC4}" type="datetimeFigureOut">
               <a:rPr lang="en-US" smtClean="0"/>
-              <a:t>1/27/13</a:t>
+              <a:t>9/11/26</a:t>
             </a:fld>
             <a:endParaRPr lang="en-US"/>
           </a:p>
@@ -2228,10 +2268,9 @@
           </a:lstStyle>
           <a:p>
             <a:r>
-              <a:rPr lang="en-US" smtClean="0"/>
+              <a:rPr lang="en-US"/>
               <a:t>Click to edit Master title style</a:t>
             </a:r>
-            <a:endParaRPr lang="en-US"/>
           </a:p>
         </p:txBody>
       </p:sp>
@@ -2285,38 +2324,37 @@
           <a:p>
             <a:pPr lvl="0"/>
             <a:r>
-              <a:rPr lang="en-US" smtClean="0"/>
+              <a:rPr lang="en-US"/>
               <a:t>Click to edit Master text styles</a:t>
             </a:r>
           </a:p>
           <a:p>
             <a:pPr lvl="1"/>
             <a:r>
-              <a:rPr lang="en-US" smtClean="0"/>
+              <a:rPr lang="en-US"/>
               <a:t>Second level</a:t>
             </a:r>
           </a:p>
           <a:p>
             <a:pPr lvl="2"/>
             <a:r>
-              <a:rPr lang="en-US" smtClean="0"/>
+              <a:rPr lang="en-US"/>
               <a:t>Third level</a:t>
             </a:r>
           </a:p>
           <a:p>
             <a:pPr lvl="3"/>
             <a:r>
-              <a:rPr lang="en-US" smtClean="0"/>
+              <a:rPr lang="en-US"/>
               <a:t>Fourth level</a:t>
             </a:r>
           </a:p>
           <a:p>
             <a:pPr lvl="4"/>
             <a:r>
-              <a:rPr lang="en-US" smtClean="0"/>
+              <a:rPr lang="en-US"/>
               <a:t>Fifth level</a:t>
             </a:r>
-            <a:endParaRPr lang="en-US"/>
           </a:p>
         </p:txBody>
       </p:sp>
@@ -2379,7 +2417,7 @@
           <a:p>
             <a:pPr lvl="0"/>
             <a:r>
-              <a:rPr lang="en-US" smtClean="0"/>
+              <a:rPr lang="en-US"/>
               <a:t>Click to edit Master text styles</a:t>
             </a:r>
           </a:p>
@@ -2402,7 +2440,7 @@
           <a:p>
             <a:fld id="{5BCAD085-E8A6-8845-BD4E-CB4CCA059FC4}" type="datetimeFigureOut">
               <a:rPr lang="en-US" smtClean="0"/>
-              <a:t>1/27/13</a:t>
+              <a:t>9/11/26</a:t>
             </a:fld>
             <a:endParaRPr lang="en-US"/>
           </a:p>
@@ -2505,10 +2543,9 @@
           </a:lstStyle>
           <a:p>
             <a:r>
-              <a:rPr lang="en-US" smtClean="0"/>
+              <a:rPr lang="en-US"/>
               <a:t>Click to edit Master title style</a:t>
             </a:r>
-            <a:endParaRPr lang="en-US"/>
           </a:p>
         </p:txBody>
       </p:sp>
@@ -2632,7 +2669,7 @@
           <a:p>
             <a:pPr lvl="0"/>
             <a:r>
-              <a:rPr lang="en-US" smtClean="0"/>
+              <a:rPr lang="en-US"/>
               <a:t>Click to edit Master text styles</a:t>
             </a:r>
           </a:p>
@@ -2655,7 +2692,7 @@
           <a:p>
             <a:fld id="{5BCAD085-E8A6-8845-BD4E-CB4CCA059FC4}" type="datetimeFigureOut">
               <a:rPr lang="en-US" smtClean="0"/>
-              <a:t>1/27/13</a:t>
+              <a:t>9/11/26</a:t>
             </a:fld>
             <a:endParaRPr lang="en-US"/>
           </a:p>
@@ -2764,10 +2801,9 @@
           <a:lstStyle/>
           <a:p>
             <a:r>
-              <a:rPr lang="en-US" smtClean="0"/>
+              <a:rPr lang="en-US"/>
               <a:t>Click to edit Master title style</a:t>
             </a:r>
-            <a:endParaRPr lang="en-US"/>
           </a:p>
         </p:txBody>
       </p:sp>
@@ -2798,38 +2834,37 @@
           <a:p>
             <a:pPr lvl="0"/>
             <a:r>
-              <a:rPr lang="en-US" smtClean="0"/>
+              <a:rPr lang="en-US"/>
               <a:t>Click to edit Master text styles</a:t>
             </a:r>
           </a:p>
           <a:p>
             <a:pPr lvl="1"/>
             <a:r>
-              <a:rPr lang="en-US" smtClean="0"/>
+              <a:rPr lang="en-US"/>
               <a:t>Second level</a:t>
             </a:r>
           </a:p>
           <a:p>
             <a:pPr lvl="2"/>
             <a:r>
-              <a:rPr lang="en-US" smtClean="0"/>
+              <a:rPr lang="en-US"/>
               <a:t>Third level</a:t>
             </a:r>
           </a:p>
           <a:p>
             <a:pPr lvl="3"/>
             <a:r>
-              <a:rPr lang="en-US" smtClean="0"/>
+              <a:rPr lang="en-US"/>
               <a:t>Fourth level</a:t>
             </a:r>
           </a:p>
           <a:p>
             <a:pPr lvl="4"/>
             <a:r>
-              <a:rPr lang="en-US" smtClean="0"/>
+              <a:rPr lang="en-US"/>
               <a:t>Fifth level</a:t>
             </a:r>
-            <a:endParaRPr lang="en-US"/>
           </a:p>
         </p:txBody>
       </p:sp>
@@ -2868,7 +2903,7 @@
           <a:p>
             <a:fld id="{5BCAD085-E8A6-8845-BD4E-CB4CCA059FC4}" type="datetimeFigureOut">
               <a:rPr lang="en-US" smtClean="0"/>
-              <a:t>1/27/13</a:t>
+              <a:t>9/11/26</a:t>
             </a:fld>
             <a:endParaRPr lang="en-US"/>
           </a:p>
@@ -3227,7 +3262,7 @@
 </file>
 
 <file path=ppt/slides/slide1.xml><?xml version="1.0" encoding="utf-8"?>
-<p:sld xmlns:a="http://schemas.openxmlformats.org/drawingml/2006/main" xmlns:p="http://schemas.openxmlformats.org/presentationml/2006/main" xmlns:r="http://schemas.openxmlformats.org/officeDocument/2006/relationships">
+<p:sld xmlns:a="http://schemas.openxmlformats.org/drawingml/2006/main" xmlns:r="http://schemas.openxmlformats.org/officeDocument/2006/relationships" xmlns:p="http://schemas.openxmlformats.org/presentationml/2006/main">
   <p:cSld>
     <p:bg>
       <p:bgPr>
@@ -3243,7 +3278,14 @@
         <p:cNvGrpSpPr/>
         <p:nvPr/>
       </p:nvGrpSpPr>
-      <p:grpSpPr/>
+      <p:grpSpPr>
+        <a:xfrm>
+          <a:off x="0" y="0"/>
+          <a:ext cx="0" cy="0"/>
+          <a:chOff x="0" y="0"/>
+          <a:chExt cx="0" cy="0"/>
+        </a:xfrm>
+      </p:grpSpPr>
       <p:sp>
         <p:nvSpPr>
           <p:cNvPr id="2" name="TextBox 1"/>
@@ -3358,7 +3400,7 @@
         <p:spPr>
           <a:xfrm>
             <a:off x="777240" y="5303520"/>
-            <a:ext cx="10058400" cy="365760"/>
+            <a:ext cx="10058400" cy="292388"/>
           </a:xfrm>
           <a:prstGeom prst="rect">
             <a:avLst/>
@@ -3373,13 +3415,13 @@
           <a:p>
             <a:pPr algn="l"/>
             <a:r>
-              <a:rPr sz="1300" b="0">
+              <a:rPr sz="1300" b="0" dirty="0">
                 <a:solidFill>
                   <a:srgbClr val="AEB8CF"/>
                 </a:solidFill>
                 <a:latin typeface="PingFang TC"/>
               </a:rPr>
-              <a:t>期間：2026-07-02 – 2026-09-06　｜　截至 Git 最新提交</a:t>
+              <a:t>期間：2026-07-02 – 2026-09-06</a:t>
             </a:r>
           </a:p>
         </p:txBody>
@@ -3393,7 +3435,7 @@
 </file>
 
 <file path=ppt/slides/slide10.xml><?xml version="1.0" encoding="utf-8"?>
-<p:sld xmlns:a="http://schemas.openxmlformats.org/drawingml/2006/main" xmlns:p="http://schemas.openxmlformats.org/presentationml/2006/main" xmlns:r="http://schemas.openxmlformats.org/officeDocument/2006/relationships">
+<p:sld xmlns:a="http://schemas.openxmlformats.org/drawingml/2006/main" xmlns:r="http://schemas.openxmlformats.org/officeDocument/2006/relationships" xmlns:p="http://schemas.openxmlformats.org/presentationml/2006/main">
   <p:cSld>
     <p:bg>
       <p:bgPr>
@@ -3409,7 +3451,14 @@
         <p:cNvGrpSpPr/>
         <p:nvPr/>
       </p:nvGrpSpPr>
-      <p:grpSpPr/>
+      <p:grpSpPr>
+        <a:xfrm>
+          <a:off x="0" y="0"/>
+          <a:ext cx="0" cy="0"/>
+          <a:chOff x="0" y="0"/>
+          <a:chExt cx="0" cy="0"/>
+        </a:xfrm>
+      </p:grpSpPr>
       <p:sp>
         <p:nvSpPr>
           <p:cNvPr id="2" name="Rectangle 1"/>
@@ -3450,6 +3499,7 @@
           <a:lstStyle/>
           <a:p>
             <a:pPr algn="ctr"/>
+            <a:endParaRPr/>
           </a:p>
         </p:txBody>
       </p:sp>
@@ -3565,6 +3615,7 @@
           <a:lstStyle/>
           <a:p>
             <a:pPr algn="ctr"/>
+            <a:endParaRPr/>
           </a:p>
         </p:txBody>
       </p:sp>
@@ -3683,6 +3734,7 @@
           <a:lstStyle/>
           <a:p>
             <a:pPr algn="ctr"/>
+            <a:endParaRPr/>
           </a:p>
         </p:txBody>
       </p:sp>
@@ -3801,6 +3853,7 @@
           <a:lstStyle/>
           <a:p>
             <a:pPr algn="ctr"/>
+            <a:endParaRPr/>
           </a:p>
         </p:txBody>
       </p:sp>
@@ -3886,7 +3939,7 @@
 </file>
 
 <file path=ppt/slides/slide11.xml><?xml version="1.0" encoding="utf-8"?>
-<p:sld xmlns:a="http://schemas.openxmlformats.org/drawingml/2006/main" xmlns:p="http://schemas.openxmlformats.org/presentationml/2006/main" xmlns:r="http://schemas.openxmlformats.org/officeDocument/2006/relationships">
+<p:sld xmlns:a="http://schemas.openxmlformats.org/drawingml/2006/main" xmlns:r="http://schemas.openxmlformats.org/officeDocument/2006/relationships" xmlns:p="http://schemas.openxmlformats.org/presentationml/2006/main">
   <p:cSld>
     <p:bg>
       <p:bgPr>
@@ -3902,7 +3955,14 @@
         <p:cNvGrpSpPr/>
         <p:nvPr/>
       </p:nvGrpSpPr>
-      <p:grpSpPr/>
+      <p:grpSpPr>
+        <a:xfrm>
+          <a:off x="0" y="0"/>
+          <a:ext cx="0" cy="0"/>
+          <a:chOff x="0" y="0"/>
+          <a:chExt cx="0" cy="0"/>
+        </a:xfrm>
+      </p:grpSpPr>
       <p:sp>
         <p:nvSpPr>
           <p:cNvPr id="2" name="Rectangle 1"/>
@@ -3943,6 +4003,7 @@
           <a:lstStyle/>
           <a:p>
             <a:pPr algn="ctr"/>
+            <a:endParaRPr/>
           </a:p>
         </p:txBody>
       </p:sp>
@@ -4305,7 +4366,7 @@
 </file>
 
 <file path=ppt/slides/slide12.xml><?xml version="1.0" encoding="utf-8"?>
-<p:sld xmlns:a="http://schemas.openxmlformats.org/drawingml/2006/main" xmlns:p="http://schemas.openxmlformats.org/presentationml/2006/main" xmlns:r="http://schemas.openxmlformats.org/officeDocument/2006/relationships">
+<p:sld xmlns:a="http://schemas.openxmlformats.org/drawingml/2006/main" xmlns:r="http://schemas.openxmlformats.org/officeDocument/2006/relationships" xmlns:p="http://schemas.openxmlformats.org/presentationml/2006/main">
   <p:cSld>
     <p:bg>
       <p:bgPr>
@@ -4321,7 +4382,14 @@
         <p:cNvGrpSpPr/>
         <p:nvPr/>
       </p:nvGrpSpPr>
-      <p:grpSpPr/>
+      <p:grpSpPr>
+        <a:xfrm>
+          <a:off x="0" y="0"/>
+          <a:ext cx="0" cy="0"/>
+          <a:chOff x="0" y="0"/>
+          <a:chExt cx="0" cy="0"/>
+        </a:xfrm>
+      </p:grpSpPr>
       <p:sp>
         <p:nvSpPr>
           <p:cNvPr id="2" name="Rectangle 1"/>
@@ -4362,6 +4430,7 @@
           <a:lstStyle/>
           <a:p>
             <a:pPr algn="ctr"/>
+            <a:endParaRPr/>
           </a:p>
         </p:txBody>
       </p:sp>
@@ -4549,7 +4618,7 @@
 </file>
 
 <file path=ppt/slides/slide2.xml><?xml version="1.0" encoding="utf-8"?>
-<p:sld xmlns:a="http://schemas.openxmlformats.org/drawingml/2006/main" xmlns:p="http://schemas.openxmlformats.org/presentationml/2006/main" xmlns:r="http://schemas.openxmlformats.org/officeDocument/2006/relationships">
+<p:sld xmlns:a="http://schemas.openxmlformats.org/drawingml/2006/main" xmlns:r="http://schemas.openxmlformats.org/officeDocument/2006/relationships" xmlns:p="http://schemas.openxmlformats.org/presentationml/2006/main">
   <p:cSld>
     <p:bg>
       <p:bgPr>
@@ -4565,7 +4634,14 @@
         <p:cNvGrpSpPr/>
         <p:nvPr/>
       </p:nvGrpSpPr>
-      <p:grpSpPr/>
+      <p:grpSpPr>
+        <a:xfrm>
+          <a:off x="0" y="0"/>
+          <a:ext cx="0" cy="0"/>
+          <a:chOff x="0" y="0"/>
+          <a:chExt cx="0" cy="0"/>
+        </a:xfrm>
+      </p:grpSpPr>
       <p:sp>
         <p:nvSpPr>
           <p:cNvPr id="2" name="Rectangle 1"/>
@@ -4606,6 +4682,7 @@
           <a:lstStyle/>
           <a:p>
             <a:pPr algn="ctr"/>
+            <a:endParaRPr/>
           </a:p>
         </p:txBody>
       </p:sp>
@@ -4721,6 +4798,7 @@
           <a:lstStyle/>
           <a:p>
             <a:pPr algn="ctr"/>
+            <a:endParaRPr/>
           </a:p>
         </p:txBody>
       </p:sp>
@@ -4838,6 +4916,7 @@
           <a:lstStyle/>
           <a:p>
             <a:pPr algn="ctr"/>
+            <a:endParaRPr/>
           </a:p>
         </p:txBody>
       </p:sp>
@@ -4955,6 +5034,7 @@
           <a:lstStyle/>
           <a:p>
             <a:pPr algn="ctr"/>
+            <a:endParaRPr/>
           </a:p>
         </p:txBody>
       </p:sp>
@@ -5074,7 +5154,7 @@
 </file>
 
 <file path=ppt/slides/slide3.xml><?xml version="1.0" encoding="utf-8"?>
-<p:sld xmlns:a="http://schemas.openxmlformats.org/drawingml/2006/main" xmlns:p="http://schemas.openxmlformats.org/presentationml/2006/main" xmlns:r="http://schemas.openxmlformats.org/officeDocument/2006/relationships">
+<p:sld xmlns:a="http://schemas.openxmlformats.org/drawingml/2006/main" xmlns:r="http://schemas.openxmlformats.org/officeDocument/2006/relationships" xmlns:p="http://schemas.openxmlformats.org/presentationml/2006/main">
   <p:cSld>
     <p:bg>
       <p:bgPr>
@@ -5090,7 +5170,14 @@
         <p:cNvGrpSpPr/>
         <p:nvPr/>
       </p:nvGrpSpPr>
-      <p:grpSpPr/>
+      <p:grpSpPr>
+        <a:xfrm>
+          <a:off x="0" y="0"/>
+          <a:ext cx="0" cy="0"/>
+          <a:chOff x="0" y="0"/>
+          <a:chExt cx="0" cy="0"/>
+        </a:xfrm>
+      </p:grpSpPr>
       <p:sp>
         <p:nvSpPr>
           <p:cNvPr id="2" name="Rectangle 1"/>
@@ -5131,6 +5218,7 @@
           <a:lstStyle/>
           <a:p>
             <a:pPr algn="ctr"/>
+            <a:endParaRPr/>
           </a:p>
         </p:txBody>
       </p:sp>
@@ -5218,7 +5306,7 @@
         </p:xfrm>
         <a:graphic>
           <a:graphicData uri="http://schemas.openxmlformats.org/drawingml/2006/chart">
-            <c:chart xmlns:c="http://schemas.openxmlformats.org/drawingml/2006/chart" r:id="rId2"/>
+            <c:chart xmlns:c="http://schemas.openxmlformats.org/drawingml/2006/chart" xmlns:r="http://schemas.openxmlformats.org/officeDocument/2006/relationships" r:id="rId2"/>
           </a:graphicData>
         </a:graphic>
       </p:graphicFrame>
@@ -5264,6 +5352,7 @@
           <a:lstStyle/>
           <a:p>
             <a:pPr algn="ctr"/>
+            <a:endParaRPr/>
           </a:p>
         </p:txBody>
       </p:sp>
@@ -5379,6 +5468,7 @@
           <a:lstStyle/>
           <a:p>
             <a:pPr algn="ctr"/>
+            <a:endParaRPr/>
           </a:p>
         </p:txBody>
       </p:sp>
@@ -5494,6 +5584,7 @@
           <a:lstStyle/>
           <a:p>
             <a:pPr algn="ctr"/>
+            <a:endParaRPr/>
           </a:p>
         </p:txBody>
       </p:sp>
@@ -5576,7 +5667,7 @@
 </file>
 
 <file path=ppt/slides/slide4.xml><?xml version="1.0" encoding="utf-8"?>
-<p:sld xmlns:a="http://schemas.openxmlformats.org/drawingml/2006/main" xmlns:p="http://schemas.openxmlformats.org/presentationml/2006/main" xmlns:r="http://schemas.openxmlformats.org/officeDocument/2006/relationships">
+<p:sld xmlns:a="http://schemas.openxmlformats.org/drawingml/2006/main" xmlns:r="http://schemas.openxmlformats.org/officeDocument/2006/relationships" xmlns:p="http://schemas.openxmlformats.org/presentationml/2006/main">
   <p:cSld>
     <p:bg>
       <p:bgPr>
@@ -5592,7 +5683,14 @@
         <p:cNvGrpSpPr/>
         <p:nvPr/>
       </p:nvGrpSpPr>
-      <p:grpSpPr/>
+      <p:grpSpPr>
+        <a:xfrm>
+          <a:off x="0" y="0"/>
+          <a:ext cx="0" cy="0"/>
+          <a:chOff x="0" y="0"/>
+          <a:chExt cx="0" cy="0"/>
+        </a:xfrm>
+      </p:grpSpPr>
       <p:sp>
         <p:nvSpPr>
           <p:cNvPr id="2" name="Rectangle 1"/>
@@ -5633,6 +5731,7 @@
           <a:lstStyle/>
           <a:p>
             <a:pPr algn="ctr"/>
+            <a:endParaRPr/>
           </a:p>
         </p:txBody>
       </p:sp>
@@ -5748,6 +5847,7 @@
           <a:lstStyle/>
           <a:p>
             <a:pPr algn="ctr"/>
+            <a:endParaRPr/>
           </a:p>
         </p:txBody>
       </p:sp>
@@ -5868,6 +5968,7 @@
           <a:lstStyle/>
           <a:p>
             <a:pPr algn="ctr"/>
+            <a:endParaRPr/>
           </a:p>
         </p:txBody>
       </p:sp>
@@ -5988,6 +6089,7 @@
           <a:lstStyle/>
           <a:p>
             <a:pPr algn="ctr"/>
+            <a:endParaRPr/>
           </a:p>
         </p:txBody>
       </p:sp>
@@ -6074,7 +6176,7 @@
 </file>
 
 <file path=ppt/slides/slide5.xml><?xml version="1.0" encoding="utf-8"?>
-<p:sld xmlns:a="http://schemas.openxmlformats.org/drawingml/2006/main" xmlns:p="http://schemas.openxmlformats.org/presentationml/2006/main" xmlns:r="http://schemas.openxmlformats.org/officeDocument/2006/relationships">
+<p:sld xmlns:a="http://schemas.openxmlformats.org/drawingml/2006/main" xmlns:r="http://schemas.openxmlformats.org/officeDocument/2006/relationships" xmlns:p="http://schemas.openxmlformats.org/presentationml/2006/main">
   <p:cSld>
     <p:bg>
       <p:bgPr>
@@ -6090,7 +6192,14 @@
         <p:cNvGrpSpPr/>
         <p:nvPr/>
       </p:nvGrpSpPr>
-      <p:grpSpPr/>
+      <p:grpSpPr>
+        <a:xfrm>
+          <a:off x="0" y="0"/>
+          <a:ext cx="0" cy="0"/>
+          <a:chOff x="0" y="0"/>
+          <a:chExt cx="0" cy="0"/>
+        </a:xfrm>
+      </p:grpSpPr>
       <p:sp>
         <p:nvSpPr>
           <p:cNvPr id="2" name="Rectangle 1"/>
@@ -6131,6 +6240,7 @@
           <a:lstStyle/>
           <a:p>
             <a:pPr algn="ctr"/>
+            <a:endParaRPr/>
           </a:p>
         </p:txBody>
       </p:sp>
@@ -6281,6 +6391,7 @@
           <a:lstStyle/>
           <a:p>
             <a:pPr algn="ctr"/>
+            <a:endParaRPr/>
           </a:p>
         </p:txBody>
       </p:sp>
@@ -6399,6 +6510,7 @@
           <a:lstStyle/>
           <a:p>
             <a:pPr algn="ctr"/>
+            <a:endParaRPr/>
           </a:p>
         </p:txBody>
       </p:sp>
@@ -6517,6 +6629,7 @@
           <a:lstStyle/>
           <a:p>
             <a:pPr algn="ctr"/>
+            <a:endParaRPr/>
           </a:p>
         </p:txBody>
       </p:sp>
@@ -6637,7 +6750,7 @@
 </file>
 
 <file path=ppt/slides/slide6.xml><?xml version="1.0" encoding="utf-8"?>
-<p:sld xmlns:a="http://schemas.openxmlformats.org/drawingml/2006/main" xmlns:p="http://schemas.openxmlformats.org/presentationml/2006/main" xmlns:r="http://schemas.openxmlformats.org/officeDocument/2006/relationships">
+<p:sld xmlns:a="http://schemas.openxmlformats.org/drawingml/2006/main" xmlns:r="http://schemas.openxmlformats.org/officeDocument/2006/relationships" xmlns:p="http://schemas.openxmlformats.org/presentationml/2006/main">
   <p:cSld>
     <p:bg>
       <p:bgPr>
@@ -6653,7 +6766,14 @@
         <p:cNvGrpSpPr/>
         <p:nvPr/>
       </p:nvGrpSpPr>
-      <p:grpSpPr/>
+      <p:grpSpPr>
+        <a:xfrm>
+          <a:off x="0" y="0"/>
+          <a:ext cx="0" cy="0"/>
+          <a:chOff x="0" y="0"/>
+          <a:chExt cx="0" cy="0"/>
+        </a:xfrm>
+      </p:grpSpPr>
       <p:sp>
         <p:nvSpPr>
           <p:cNvPr id="2" name="Rectangle 1"/>
@@ -6694,6 +6814,7 @@
           <a:lstStyle/>
           <a:p>
             <a:pPr algn="ctr"/>
+            <a:endParaRPr/>
           </a:p>
         </p:txBody>
       </p:sp>
@@ -6809,6 +6930,7 @@
           <a:lstStyle/>
           <a:p>
             <a:pPr algn="ctr"/>
+            <a:endParaRPr/>
           </a:p>
         </p:txBody>
       </p:sp>
@@ -6927,6 +7049,7 @@
           <a:lstStyle/>
           <a:p>
             <a:pPr algn="ctr"/>
+            <a:endParaRPr/>
           </a:p>
         </p:txBody>
       </p:sp>
@@ -7046,6 +7169,7 @@
           <a:lstStyle/>
           <a:p>
             <a:pPr algn="ctr"/>
+            <a:endParaRPr/>
           </a:p>
         </p:txBody>
       </p:sp>
@@ -7131,7 +7255,7 @@
 </file>
 
 <file path=ppt/slides/slide7.xml><?xml version="1.0" encoding="utf-8"?>
-<p:sld xmlns:a="http://schemas.openxmlformats.org/drawingml/2006/main" xmlns:p="http://schemas.openxmlformats.org/presentationml/2006/main" xmlns:r="http://schemas.openxmlformats.org/officeDocument/2006/relationships">
+<p:sld xmlns:a="http://schemas.openxmlformats.org/drawingml/2006/main" xmlns:r="http://schemas.openxmlformats.org/officeDocument/2006/relationships" xmlns:p="http://schemas.openxmlformats.org/presentationml/2006/main">
   <p:cSld>
     <p:bg>
       <p:bgPr>
@@ -7147,7 +7271,14 @@
         <p:cNvGrpSpPr/>
         <p:nvPr/>
       </p:nvGrpSpPr>
-      <p:grpSpPr/>
+      <p:grpSpPr>
+        <a:xfrm>
+          <a:off x="0" y="0"/>
+          <a:ext cx="0" cy="0"/>
+          <a:chOff x="0" y="0"/>
+          <a:chExt cx="0" cy="0"/>
+        </a:xfrm>
+      </p:grpSpPr>
       <p:sp>
         <p:nvSpPr>
           <p:cNvPr id="2" name="Rectangle 1"/>
@@ -7188,6 +7319,7 @@
           <a:lstStyle/>
           <a:p>
             <a:pPr algn="ctr"/>
+            <a:endParaRPr/>
           </a:p>
         </p:txBody>
       </p:sp>
@@ -7338,6 +7470,7 @@
           <a:lstStyle/>
           <a:p>
             <a:pPr algn="ctr"/>
+            <a:endParaRPr/>
           </a:p>
         </p:txBody>
       </p:sp>
@@ -7455,6 +7588,7 @@
           <a:lstStyle/>
           <a:p>
             <a:pPr algn="ctr"/>
+            <a:endParaRPr/>
           </a:p>
         </p:txBody>
       </p:sp>
@@ -7572,6 +7706,7 @@
           <a:lstStyle/>
           <a:p>
             <a:pPr algn="ctr"/>
+            <a:endParaRPr/>
           </a:p>
         </p:txBody>
       </p:sp>
@@ -7691,7 +7826,7 @@
 </file>
 
 <file path=ppt/slides/slide8.xml><?xml version="1.0" encoding="utf-8"?>
-<p:sld xmlns:a="http://schemas.openxmlformats.org/drawingml/2006/main" xmlns:p="http://schemas.openxmlformats.org/presentationml/2006/main" xmlns:r="http://schemas.openxmlformats.org/officeDocument/2006/relationships">
+<p:sld xmlns:a="http://schemas.openxmlformats.org/drawingml/2006/main" xmlns:r="http://schemas.openxmlformats.org/officeDocument/2006/relationships" xmlns:p="http://schemas.openxmlformats.org/presentationml/2006/main">
   <p:cSld>
     <p:bg>
       <p:bgPr>
@@ -7707,7 +7842,14 @@
         <p:cNvGrpSpPr/>
         <p:nvPr/>
       </p:nvGrpSpPr>
-      <p:grpSpPr/>
+      <p:grpSpPr>
+        <a:xfrm>
+          <a:off x="0" y="0"/>
+          <a:ext cx="0" cy="0"/>
+          <a:chOff x="0" y="0"/>
+          <a:chExt cx="0" cy="0"/>
+        </a:xfrm>
+      </p:grpSpPr>
       <p:sp>
         <p:nvSpPr>
           <p:cNvPr id="2" name="Rectangle 1"/>
@@ -7748,6 +7890,7 @@
           <a:lstStyle/>
           <a:p>
             <a:pPr algn="ctr"/>
+            <a:endParaRPr/>
           </a:p>
         </p:txBody>
       </p:sp>
@@ -7863,6 +8006,7 @@
           <a:lstStyle/>
           <a:p>
             <a:pPr algn="ctr"/>
+            <a:endParaRPr/>
           </a:p>
         </p:txBody>
       </p:sp>
@@ -7982,6 +8126,7 @@
           <a:lstStyle/>
           <a:p>
             <a:pPr algn="ctr"/>
+            <a:endParaRPr/>
           </a:p>
         </p:txBody>
       </p:sp>
@@ -8101,6 +8246,7 @@
           <a:lstStyle/>
           <a:p>
             <a:pPr algn="ctr"/>
+            <a:endParaRPr/>
           </a:p>
         </p:txBody>
       </p:sp>
@@ -8187,7 +8333,7 @@
 </file>
 
 <file path=ppt/slides/slide9.xml><?xml version="1.0" encoding="utf-8"?>
-<p:sld xmlns:a="http://schemas.openxmlformats.org/drawingml/2006/main" xmlns:p="http://schemas.openxmlformats.org/presentationml/2006/main" xmlns:r="http://schemas.openxmlformats.org/officeDocument/2006/relationships">
+<p:sld xmlns:a="http://schemas.openxmlformats.org/drawingml/2006/main" xmlns:r="http://schemas.openxmlformats.org/officeDocument/2006/relationships" xmlns:p="http://schemas.openxmlformats.org/presentationml/2006/main">
   <p:cSld>
     <p:bg>
       <p:bgPr>
@@ -8203,7 +8349,14 @@
         <p:cNvGrpSpPr/>
         <p:nvPr/>
       </p:nvGrpSpPr>
-      <p:grpSpPr/>
+      <p:grpSpPr>
+        <a:xfrm>
+          <a:off x="0" y="0"/>
+          <a:ext cx="0" cy="0"/>
+          <a:chOff x="0" y="0"/>
+          <a:chExt cx="0" cy="0"/>
+        </a:xfrm>
+      </p:grpSpPr>
       <p:sp>
         <p:nvSpPr>
           <p:cNvPr id="2" name="Rectangle 1"/>
@@ -8244,6 +8397,7 @@
           <a:lstStyle/>
           <a:p>
             <a:pPr algn="ctr"/>
+            <a:endParaRPr/>
           </a:p>
         </p:txBody>
       </p:sp>
@@ -8359,6 +8513,7 @@
           <a:lstStyle/>
           <a:p>
             <a:pPr algn="ctr"/>
+            <a:endParaRPr/>
           </a:p>
         </p:txBody>
       </p:sp>
@@ -8478,6 +8633,7 @@
           <a:lstStyle/>
           <a:p>
             <a:pPr algn="ctr"/>
+            <a:endParaRPr/>
           </a:p>
         </p:txBody>
       </p:sp>
